--- a/skill/references/examples/patterns.pptx
+++ b/skill/references/examples/patterns.pptx
@@ -13029,7 +13029,7 @@
           </a:fontRef>
         </p:style>
         <p:txBody>
-          <a:bodyPr wrap="square" rtlCol="0" anchor="ctr">
+          <a:bodyPr wrap="none" rtlCol="0" anchor="ctr" lIns="19050" rIns="19050">
             <a:noAutofit/>
           </a:bodyPr>
           <a:lstStyle/>
